--- a/slides/workshop-1.pptx
+++ b/slides/workshop-1.pptx
@@ -5,12 +5,14 @@
     <p:sldMasterId id="2147483648" r:id="rId1"/>
   </p:sldMasterIdLst>
   <p:notesMasterIdLst>
-    <p:notesMasterId r:id="rId5"/>
+    <p:notesMasterId r:id="rId7"/>
   </p:notesMasterIdLst>
   <p:sldIdLst>
     <p:sldId id="321" r:id="rId2"/>
     <p:sldId id="439" r:id="rId3"/>
-    <p:sldId id="430" r:id="rId4"/>
+    <p:sldId id="441" r:id="rId4"/>
+    <p:sldId id="430" r:id="rId5"/>
+    <p:sldId id="440" r:id="rId6"/>
   </p:sldIdLst>
   <p:sldSz cx="12192000" cy="6858000"/>
   <p:notesSz cx="6858000" cy="9144000"/>
@@ -117,12 +119,20 @@
 </p:presentation>
 </file>
 
+<file path=ppt/revisionInfo.xml><?xml version="1.0" encoding="utf-8"?>
+<p1510:revInfo xmlns:a="http://schemas.openxmlformats.org/drawingml/2006/main" xmlns:r="http://schemas.openxmlformats.org/officeDocument/2006/relationships" xmlns:p1510="http://schemas.microsoft.com/office/powerpoint/2015/10/main">
+  <p1510:revLst>
+    <p1510:client id="{E18CF9ED-2619-4CA2-85BA-81DCBC2418A5}" v="1" dt="2026-09-23T01:33:22.804"/>
+  </p1510:revLst>
+</p1510:revInfo>
+</file>
+
 <file path=ppt/changesInfos/changesInfo1.xml><?xml version="1.0" encoding="utf-8"?>
 <pc:chgInfo xmlns:a="http://schemas.openxmlformats.org/drawingml/2006/main" xmlns:r="http://schemas.openxmlformats.org/officeDocument/2006/relationships" xmlns:ac="http://schemas.microsoft.com/office/drawing/2013/main/command" xmlns:pc="http://schemas.microsoft.com/office/powerpoint/2013/main/command">
   <pc:docChgLst>
     <pc:chgData name="Luz Pascal" userId="7fa5ceab-0349-4458-880b-7c4b9ec82b0a" providerId="ADAL" clId="{A49E9F3A-B52D-461E-ABF6-58A75CE30F76}"/>
     <pc:docChg chg="undo custSel addSld delSld modSld sldOrd">
-      <pc:chgData name="Luz Pascal" userId="7fa5ceab-0349-4458-880b-7c4b9ec82b0a" providerId="ADAL" clId="{A49E9F3A-B52D-461E-ABF6-58A75CE30F76}" dt="2026-09-22T02:17:25.041" v="15004" actId="47"/>
+      <pc:chgData name="Luz Pascal" userId="7fa5ceab-0349-4458-880b-7c4b9ec82b0a" providerId="ADAL" clId="{A49E9F3A-B52D-461E-ABF6-58A75CE30F76}" dt="2026-09-23T01:48:44.801" v="15455" actId="20577"/>
       <pc:docMkLst>
         <pc:docMk/>
       </pc:docMkLst>
@@ -239,13 +249,13 @@
         </pc:sldMkLst>
       </pc:sldChg>
       <pc:sldChg chg="addSp delSp modSp mod modTransition modClrScheme chgLayout">
-        <pc:chgData name="Luz Pascal" userId="7fa5ceab-0349-4458-880b-7c4b9ec82b0a" providerId="ADAL" clId="{A49E9F3A-B52D-461E-ABF6-58A75CE30F76}" dt="2026-09-18T04:58:22.091" v="14837" actId="20577"/>
+        <pc:chgData name="Luz Pascal" userId="7fa5ceab-0349-4458-880b-7c4b9ec82b0a" providerId="ADAL" clId="{A49E9F3A-B52D-461E-ABF6-58A75CE30F76}" dt="2026-09-23T01:28:44.101" v="15080" actId="1036"/>
         <pc:sldMkLst>
           <pc:docMk/>
           <pc:sldMk cId="1190953413" sldId="321"/>
         </pc:sldMkLst>
         <pc:spChg chg="add mod ord">
-          <ac:chgData name="Luz Pascal" userId="7fa5ceab-0349-4458-880b-7c4b9ec82b0a" providerId="ADAL" clId="{A49E9F3A-B52D-461E-ABF6-58A75CE30F76}" dt="2026-09-17T05:05:57.774" v="13942" actId="20577"/>
+          <ac:chgData name="Luz Pascal" userId="7fa5ceab-0349-4458-880b-7c4b9ec82b0a" providerId="ADAL" clId="{A49E9F3A-B52D-461E-ABF6-58A75CE30F76}" dt="2026-09-23T01:28:44.101" v="15080" actId="1036"/>
           <ac:spMkLst>
             <pc:docMk/>
             <pc:sldMk cId="1190953413" sldId="321"/>
@@ -253,7 +263,7 @@
           </ac:spMkLst>
         </pc:spChg>
         <pc:spChg chg="add mod">
-          <ac:chgData name="Luz Pascal" userId="7fa5ceab-0349-4458-880b-7c4b9ec82b0a" providerId="ADAL" clId="{A49E9F3A-B52D-461E-ABF6-58A75CE30F76}" dt="2026-09-18T04:58:22.091" v="14837" actId="20577"/>
+          <ac:chgData name="Luz Pascal" userId="7fa5ceab-0349-4458-880b-7c4b9ec82b0a" providerId="ADAL" clId="{A49E9F3A-B52D-461E-ABF6-58A75CE30F76}" dt="2026-09-23T01:28:36.151" v="15049" actId="20577"/>
           <ac:spMkLst>
             <pc:docMk/>
             <pc:sldMk cId="1190953413" sldId="321"/>
@@ -500,21 +510,21 @@
         </pc:sldMkLst>
       </pc:sldChg>
       <pc:sldChg chg="addSp delSp modSp new mod ord">
-        <pc:chgData name="Luz Pascal" userId="7fa5ceab-0349-4458-880b-7c4b9ec82b0a" providerId="ADAL" clId="{A49E9F3A-B52D-461E-ABF6-58A75CE30F76}" dt="2026-09-14T05:12:03.299" v="12956"/>
+        <pc:chgData name="Luz Pascal" userId="7fa5ceab-0349-4458-880b-7c4b9ec82b0a" providerId="ADAL" clId="{A49E9F3A-B52D-461E-ABF6-58A75CE30F76}" dt="2026-09-23T01:41:24.529" v="15404" actId="1076"/>
         <pc:sldMkLst>
           <pc:docMk/>
           <pc:sldMk cId="2074379464" sldId="430"/>
         </pc:sldMkLst>
         <pc:spChg chg="add mod">
-          <ac:chgData name="Luz Pascal" userId="7fa5ceab-0349-4458-880b-7c4b9ec82b0a" providerId="ADAL" clId="{A49E9F3A-B52D-461E-ABF6-58A75CE30F76}" dt="2026-09-14T04:56:58.706" v="12902" actId="113"/>
+          <ac:chgData name="Luz Pascal" userId="7fa5ceab-0349-4458-880b-7c4b9ec82b0a" providerId="ADAL" clId="{A49E9F3A-B52D-461E-ABF6-58A75CE30F76}" dt="2026-09-23T01:41:24.529" v="15404" actId="1076"/>
           <ac:spMkLst>
             <pc:docMk/>
             <pc:sldMk cId="2074379464" sldId="430"/>
             <ac:spMk id="3" creationId="{561FEE51-16AA-0BAC-49C0-BD1C2905665D}"/>
           </ac:spMkLst>
         </pc:spChg>
-        <pc:spChg chg="add mod topLvl">
-          <ac:chgData name="Luz Pascal" userId="7fa5ceab-0349-4458-880b-7c4b9ec82b0a" providerId="ADAL" clId="{A49E9F3A-B52D-461E-ABF6-58A75CE30F76}" dt="2026-09-14T05:08:19.837" v="12944" actId="1076"/>
+        <pc:spChg chg="add del mod topLvl">
+          <ac:chgData name="Luz Pascal" userId="7fa5ceab-0349-4458-880b-7c4b9ec82b0a" providerId="ADAL" clId="{A49E9F3A-B52D-461E-ABF6-58A75CE30F76}" dt="2026-09-23T01:41:17.271" v="15403" actId="478"/>
           <ac:spMkLst>
             <pc:docMk/>
             <pc:sldMk cId="2074379464" sldId="430"/>
@@ -522,71 +532,55 @@
           </ac:spMkLst>
         </pc:spChg>
         <pc:spChg chg="add del mod topLvl">
-          <ac:chgData name="Luz Pascal" userId="7fa5ceab-0349-4458-880b-7c4b9ec82b0a" providerId="ADAL" clId="{A49E9F3A-B52D-461E-ABF6-58A75CE30F76}" dt="2026-09-14T05:08:19.837" v="12944" actId="1076"/>
+          <ac:chgData name="Luz Pascal" userId="7fa5ceab-0349-4458-880b-7c4b9ec82b0a" providerId="ADAL" clId="{A49E9F3A-B52D-461E-ABF6-58A75CE30F76}" dt="2026-09-23T01:41:17.271" v="15403" actId="478"/>
           <ac:spMkLst>
             <pc:docMk/>
             <pc:sldMk cId="2074379464" sldId="430"/>
             <ac:spMk id="51" creationId="{02D209C1-0B6D-1713-3621-0F05878E37AE}"/>
           </ac:spMkLst>
         </pc:spChg>
-        <pc:spChg chg="add mod">
-          <ac:chgData name="Luz Pascal" userId="7fa5ceab-0349-4458-880b-7c4b9ec82b0a" providerId="ADAL" clId="{A49E9F3A-B52D-461E-ABF6-58A75CE30F76}" dt="2026-09-14T05:08:19.837" v="12944" actId="1076"/>
+        <pc:spChg chg="add del mod">
+          <ac:chgData name="Luz Pascal" userId="7fa5ceab-0349-4458-880b-7c4b9ec82b0a" providerId="ADAL" clId="{A49E9F3A-B52D-461E-ABF6-58A75CE30F76}" dt="2026-09-23T01:41:17.271" v="15403" actId="478"/>
           <ac:spMkLst>
             <pc:docMk/>
             <pc:sldMk cId="2074379464" sldId="430"/>
             <ac:spMk id="73" creationId="{B7BBC532-A97C-46A4-4667-7CA89217263A}"/>
           </ac:spMkLst>
         </pc:spChg>
-        <pc:spChg chg="add mod">
-          <ac:chgData name="Luz Pascal" userId="7fa5ceab-0349-4458-880b-7c4b9ec82b0a" providerId="ADAL" clId="{A49E9F3A-B52D-461E-ABF6-58A75CE30F76}" dt="2026-09-14T05:08:19.837" v="12944" actId="1076"/>
+        <pc:spChg chg="add del mod">
+          <ac:chgData name="Luz Pascal" userId="7fa5ceab-0349-4458-880b-7c4b9ec82b0a" providerId="ADAL" clId="{A49E9F3A-B52D-461E-ABF6-58A75CE30F76}" dt="2026-09-23T01:41:17.271" v="15403" actId="478"/>
           <ac:spMkLst>
             <pc:docMk/>
             <pc:sldMk cId="2074379464" sldId="430"/>
             <ac:spMk id="109" creationId="{6ACEFAEB-DDF1-8FE1-B410-43EAEE2E6994}"/>
           </ac:spMkLst>
         </pc:spChg>
-        <pc:spChg chg="add mod topLvl">
-          <ac:chgData name="Luz Pascal" userId="7fa5ceab-0349-4458-880b-7c4b9ec82b0a" providerId="ADAL" clId="{A49E9F3A-B52D-461E-ABF6-58A75CE30F76}" dt="2026-09-14T05:08:19.837" v="12944" actId="1076"/>
+        <pc:spChg chg="add del mod topLvl">
+          <ac:chgData name="Luz Pascal" userId="7fa5ceab-0349-4458-880b-7c4b9ec82b0a" providerId="ADAL" clId="{A49E9F3A-B52D-461E-ABF6-58A75CE30F76}" dt="2026-09-23T01:41:17.271" v="15403" actId="478"/>
           <ac:spMkLst>
             <pc:docMk/>
             <pc:sldMk cId="2074379464" sldId="430"/>
             <ac:spMk id="124" creationId="{1692662C-A89B-D00D-E2BC-01EE6FD452F2}"/>
           </ac:spMkLst>
         </pc:spChg>
-        <pc:spChg chg="add mod topLvl">
-          <ac:chgData name="Luz Pascal" userId="7fa5ceab-0349-4458-880b-7c4b9ec82b0a" providerId="ADAL" clId="{A49E9F3A-B52D-461E-ABF6-58A75CE30F76}" dt="2026-09-14T05:08:19.837" v="12944" actId="1076"/>
+        <pc:spChg chg="add del mod topLvl">
+          <ac:chgData name="Luz Pascal" userId="7fa5ceab-0349-4458-880b-7c4b9ec82b0a" providerId="ADAL" clId="{A49E9F3A-B52D-461E-ABF6-58A75CE30F76}" dt="2026-09-23T01:41:17.271" v="15403" actId="478"/>
           <ac:spMkLst>
             <pc:docMk/>
             <pc:sldMk cId="2074379464" sldId="430"/>
             <ac:spMk id="126" creationId="{52C56493-6EED-BDDB-69BA-9E985AE4E59D}"/>
           </ac:spMkLst>
         </pc:spChg>
-        <pc:spChg chg="add mod topLvl">
-          <ac:chgData name="Luz Pascal" userId="7fa5ceab-0349-4458-880b-7c4b9ec82b0a" providerId="ADAL" clId="{A49E9F3A-B52D-461E-ABF6-58A75CE30F76}" dt="2026-09-14T05:08:19.837" v="12944" actId="1076"/>
+        <pc:spChg chg="add del mod topLvl">
+          <ac:chgData name="Luz Pascal" userId="7fa5ceab-0349-4458-880b-7c4b9ec82b0a" providerId="ADAL" clId="{A49E9F3A-B52D-461E-ABF6-58A75CE30F76}" dt="2026-09-23T01:41:17.271" v="15403" actId="478"/>
           <ac:spMkLst>
             <pc:docMk/>
             <pc:sldMk cId="2074379464" sldId="430"/>
             <ac:spMk id="128" creationId="{123B23DF-4607-BB6C-D21D-319F67426C99}"/>
           </ac:spMkLst>
         </pc:spChg>
-        <pc:grpChg chg="add del mod">
-          <ac:chgData name="Luz Pascal" userId="7fa5ceab-0349-4458-880b-7c4b9ec82b0a" providerId="ADAL" clId="{A49E9F3A-B52D-461E-ABF6-58A75CE30F76}" dt="2026-09-14T04:53:38.537" v="12798" actId="164"/>
-          <ac:grpSpMkLst>
-            <pc:docMk/>
-            <pc:sldMk cId="2074379464" sldId="430"/>
-            <ac:grpSpMk id="43" creationId="{6C3984E4-C015-C10C-99E4-44DD0AC02AF5}"/>
-          </ac:grpSpMkLst>
-        </pc:grpChg>
-        <pc:grpChg chg="add mod">
-          <ac:chgData name="Luz Pascal" userId="7fa5ceab-0349-4458-880b-7c4b9ec82b0a" providerId="ADAL" clId="{A49E9F3A-B52D-461E-ABF6-58A75CE30F76}" dt="2026-09-14T04:55:20.376" v="12870" actId="12789"/>
-          <ac:grpSpMkLst>
-            <pc:docMk/>
-            <pc:sldMk cId="2074379464" sldId="430"/>
-            <ac:grpSpMk id="132" creationId="{A27799ED-BC50-B982-694B-9090F525D637}"/>
-          </ac:grpSpMkLst>
-        </pc:grpChg>
         <pc:picChg chg="add del mod topLvl">
-          <ac:chgData name="Luz Pascal" userId="7fa5ceab-0349-4458-880b-7c4b9ec82b0a" providerId="ADAL" clId="{A49E9F3A-B52D-461E-ABF6-58A75CE30F76}" dt="2026-09-14T05:08:19.837" v="12944" actId="1076"/>
+          <ac:chgData name="Luz Pascal" userId="7fa5ceab-0349-4458-880b-7c4b9ec82b0a" providerId="ADAL" clId="{A49E9F3A-B52D-461E-ABF6-58A75CE30F76}" dt="2026-09-23T01:41:17.271" v="15403" actId="478"/>
           <ac:picMkLst>
             <pc:docMk/>
             <pc:sldMk cId="2074379464" sldId="430"/>
@@ -617,16 +611,16 @@
             <ac:picMk id="48" creationId="{ADC12DC3-00CF-715D-B366-0924B93DDE2D}"/>
           </ac:picMkLst>
         </pc:picChg>
-        <pc:picChg chg="add mod topLvl">
-          <ac:chgData name="Luz Pascal" userId="7fa5ceab-0349-4458-880b-7c4b9ec82b0a" providerId="ADAL" clId="{A49E9F3A-B52D-461E-ABF6-58A75CE30F76}" dt="2026-09-14T05:08:19.837" v="12944" actId="1076"/>
+        <pc:picChg chg="add del mod topLvl">
+          <ac:chgData name="Luz Pascal" userId="7fa5ceab-0349-4458-880b-7c4b9ec82b0a" providerId="ADAL" clId="{A49E9F3A-B52D-461E-ABF6-58A75CE30F76}" dt="2026-09-23T01:41:17.271" v="15403" actId="478"/>
           <ac:picMkLst>
             <pc:docMk/>
             <pc:sldMk cId="2074379464" sldId="430"/>
             <ac:picMk id="111" creationId="{1BE12D3F-9CCE-DB99-5B82-1B15A8ECAFC4}"/>
           </ac:picMkLst>
         </pc:picChg>
-        <pc:picChg chg="add mod topLvl">
-          <ac:chgData name="Luz Pascal" userId="7fa5ceab-0349-4458-880b-7c4b9ec82b0a" providerId="ADAL" clId="{A49E9F3A-B52D-461E-ABF6-58A75CE30F76}" dt="2026-09-14T05:08:19.837" v="12944" actId="1076"/>
+        <pc:picChg chg="add del mod topLvl">
+          <ac:chgData name="Luz Pascal" userId="7fa5ceab-0349-4458-880b-7c4b9ec82b0a" providerId="ADAL" clId="{A49E9F3A-B52D-461E-ABF6-58A75CE30F76}" dt="2026-09-23T01:41:17.271" v="15403" actId="478"/>
           <ac:picMkLst>
             <pc:docMk/>
             <pc:sldMk cId="2074379464" sldId="430"/>
@@ -752,6 +746,44 @@
           <pc:sldMk cId="705843960" sldId="440"/>
         </pc:sldMkLst>
       </pc:sldChg>
+      <pc:sldChg chg="add del">
+        <pc:chgData name="Luz Pascal" userId="7fa5ceab-0349-4458-880b-7c4b9ec82b0a" providerId="ADAL" clId="{A49E9F3A-B52D-461E-ABF6-58A75CE30F76}" dt="2026-09-23T01:41:13.377" v="15402" actId="47"/>
+        <pc:sldMkLst>
+          <pc:docMk/>
+          <pc:sldMk cId="3187059221" sldId="440"/>
+        </pc:sldMkLst>
+      </pc:sldChg>
+      <pc:sldChg chg="addSp delSp modSp new mod">
+        <pc:chgData name="Luz Pascal" userId="7fa5ceab-0349-4458-880b-7c4b9ec82b0a" providerId="ADAL" clId="{A49E9F3A-B52D-461E-ABF6-58A75CE30F76}" dt="2026-09-23T01:48:44.801" v="15455" actId="20577"/>
+        <pc:sldMkLst>
+          <pc:docMk/>
+          <pc:sldMk cId="702636860" sldId="441"/>
+        </pc:sldMkLst>
+        <pc:spChg chg="mod">
+          <ac:chgData name="Luz Pascal" userId="7fa5ceab-0349-4458-880b-7c4b9ec82b0a" providerId="ADAL" clId="{A49E9F3A-B52D-461E-ABF6-58A75CE30F76}" dt="2026-09-23T01:33:39.498" v="15367" actId="1076"/>
+          <ac:spMkLst>
+            <pc:docMk/>
+            <pc:sldMk cId="702636860" sldId="441"/>
+            <ac:spMk id="2" creationId="{71F394DA-6449-75B8-D520-BDBDFF5A0207}"/>
+          </ac:spMkLst>
+        </pc:spChg>
+        <pc:spChg chg="mod">
+          <ac:chgData name="Luz Pascal" userId="7fa5ceab-0349-4458-880b-7c4b9ec82b0a" providerId="ADAL" clId="{A49E9F3A-B52D-461E-ABF6-58A75CE30F76}" dt="2026-09-23T01:48:44.801" v="15455" actId="20577"/>
+          <ac:spMkLst>
+            <pc:docMk/>
+            <pc:sldMk cId="702636860" sldId="441"/>
+            <ac:spMk id="3" creationId="{F285210D-3188-1466-8153-3701B5D0B0C7}"/>
+          </ac:spMkLst>
+        </pc:spChg>
+        <pc:picChg chg="add del">
+          <ac:chgData name="Luz Pascal" userId="7fa5ceab-0349-4458-880b-7c4b9ec82b0a" providerId="ADAL" clId="{A49E9F3A-B52D-461E-ABF6-58A75CE30F76}" dt="2026-09-23T01:30:46.740" v="15122" actId="22"/>
+          <ac:picMkLst>
+            <pc:docMk/>
+            <pc:sldMk cId="702636860" sldId="441"/>
+            <ac:picMk id="5" creationId="{14B58C72-E282-08AC-DB4F-7649AA6EBA83}"/>
+          </ac:picMkLst>
+        </pc:picChg>
+      </pc:sldChg>
       <pc:sldChg chg="addSp delSp modSp add del mod modAnim">
         <pc:chgData name="Luz Pascal" userId="7fa5ceab-0349-4458-880b-7c4b9ec82b0a" providerId="ADAL" clId="{A49E9F3A-B52D-461E-ABF6-58A75CE30F76}" dt="2026-09-22T02:17:25.041" v="15004" actId="47"/>
         <pc:sldMkLst>
@@ -893,7 +925,7 @@
             <a:fld id="{7859290F-2E93-48DB-8A38-B2CF63EB8058}" type="datetimeFigureOut">
               <a:rPr lang="en-AU" smtClean="0"/>
               <a:pPr/>
-              <a:t>22/09/2026</a:t>
+              <a:t>23/09/2026</a:t>
             </a:fld>
             <a:endParaRPr lang="en-AU" dirty="0"/>
           </a:p>
@@ -1235,7 +1267,7 @@
           <a:p>
             <a:fld id="{D528E6A7-8C11-4F94-9F9B-ECD6A04089B0}" type="datetimeFigureOut">
               <a:rPr lang="en-AU" smtClean="0"/>
-              <a:t>22/09/2026</a:t>
+              <a:t>23/09/2026</a:t>
             </a:fld>
             <a:endParaRPr lang="en-AU"/>
           </a:p>
@@ -1435,7 +1467,7 @@
           <a:p>
             <a:fld id="{D528E6A7-8C11-4F94-9F9B-ECD6A04089B0}" type="datetimeFigureOut">
               <a:rPr lang="en-AU" smtClean="0"/>
-              <a:t>22/09/2026</a:t>
+              <a:t>23/09/2026</a:t>
             </a:fld>
             <a:endParaRPr lang="en-AU"/>
           </a:p>
@@ -1645,7 +1677,7 @@
           <a:p>
             <a:fld id="{D528E6A7-8C11-4F94-9F9B-ECD6A04089B0}" type="datetimeFigureOut">
               <a:rPr lang="en-AU" smtClean="0"/>
-              <a:t>22/09/2026</a:t>
+              <a:t>23/09/2026</a:t>
             </a:fld>
             <a:endParaRPr lang="en-AU"/>
           </a:p>
@@ -1845,7 +1877,7 @@
           <a:p>
             <a:fld id="{D528E6A7-8C11-4F94-9F9B-ECD6A04089B0}" type="datetimeFigureOut">
               <a:rPr lang="en-AU" smtClean="0"/>
-              <a:t>22/09/2026</a:t>
+              <a:t>23/09/2026</a:t>
             </a:fld>
             <a:endParaRPr lang="en-AU"/>
           </a:p>
@@ -2121,7 +2153,7 @@
           <a:p>
             <a:fld id="{D528E6A7-8C11-4F94-9F9B-ECD6A04089B0}" type="datetimeFigureOut">
               <a:rPr lang="en-AU" smtClean="0"/>
-              <a:t>22/09/2026</a:t>
+              <a:t>23/09/2026</a:t>
             </a:fld>
             <a:endParaRPr lang="en-AU"/>
           </a:p>
@@ -2389,7 +2421,7 @@
           <a:p>
             <a:fld id="{D528E6A7-8C11-4F94-9F9B-ECD6A04089B0}" type="datetimeFigureOut">
               <a:rPr lang="en-AU" smtClean="0"/>
-              <a:t>22/09/2026</a:t>
+              <a:t>23/09/2026</a:t>
             </a:fld>
             <a:endParaRPr lang="en-AU"/>
           </a:p>
@@ -2804,7 +2836,7 @@
           <a:p>
             <a:fld id="{D528E6A7-8C11-4F94-9F9B-ECD6A04089B0}" type="datetimeFigureOut">
               <a:rPr lang="en-AU" smtClean="0"/>
-              <a:t>22/09/2026</a:t>
+              <a:t>23/09/2026</a:t>
             </a:fld>
             <a:endParaRPr lang="en-AU"/>
           </a:p>
@@ -2946,7 +2978,7 @@
           <a:p>
             <a:fld id="{D528E6A7-8C11-4F94-9F9B-ECD6A04089B0}" type="datetimeFigureOut">
               <a:rPr lang="en-AU" smtClean="0"/>
-              <a:t>22/09/2026</a:t>
+              <a:t>23/09/2026</a:t>
             </a:fld>
             <a:endParaRPr lang="en-AU"/>
           </a:p>
@@ -3059,7 +3091,7 @@
           <a:p>
             <a:fld id="{D528E6A7-8C11-4F94-9F9B-ECD6A04089B0}" type="datetimeFigureOut">
               <a:rPr lang="en-AU" smtClean="0"/>
-              <a:t>22/09/2026</a:t>
+              <a:t>23/09/2026</a:t>
             </a:fld>
             <a:endParaRPr lang="en-AU"/>
           </a:p>
@@ -3372,7 +3404,7 @@
           <a:p>
             <a:fld id="{D528E6A7-8C11-4F94-9F9B-ECD6A04089B0}" type="datetimeFigureOut">
               <a:rPr lang="en-AU" smtClean="0"/>
-              <a:t>22/09/2026</a:t>
+              <a:t>23/09/2026</a:t>
             </a:fld>
             <a:endParaRPr lang="en-AU"/>
           </a:p>
@@ -3661,7 +3693,7 @@
           <a:p>
             <a:fld id="{D528E6A7-8C11-4F94-9F9B-ECD6A04089B0}" type="datetimeFigureOut">
               <a:rPr lang="en-AU" smtClean="0"/>
-              <a:t>22/09/2026</a:t>
+              <a:t>23/09/2026</a:t>
             </a:fld>
             <a:endParaRPr lang="en-AU"/>
           </a:p>
@@ -3906,7 +3938,7 @@
             <a:fld id="{D528E6A7-8C11-4F94-9F9B-ECD6A04089B0}" type="datetimeFigureOut">
               <a:rPr lang="en-AU" smtClean="0"/>
               <a:pPr/>
-              <a:t>22/09/2026</a:t>
+              <a:t>23/09/2026</a:t>
             </a:fld>
             <a:endParaRPr lang="en-AU" dirty="0"/>
           </a:p>
@@ -4341,7 +4373,7 @@
         <p:spPr>
           <a:xfrm>
             <a:off x="492991" y="1403472"/>
-            <a:ext cx="11206018" cy="1754326"/>
+            <a:ext cx="11206018" cy="3416320"/>
           </a:xfrm>
           <a:prstGeom prst="rect">
             <a:avLst/>
@@ -4363,6 +4395,23 @@
               <a:t>Introduction to sequential decision-making for ecologists</a:t>
             </a:r>
           </a:p>
+          <a:p>
+            <a:pPr algn="ctr"/>
+            <a:endParaRPr lang="en-AU" sz="5400" dirty="0">
+              <a:latin typeface="Levenim MT" panose="02010502060101010101" pitchFamily="2" charset="-79"/>
+              <a:cs typeface="Levenim MT" panose="02010502060101010101" pitchFamily="2" charset="-79"/>
+            </a:endParaRPr>
+          </a:p>
+          <a:p>
+            <a:pPr algn="ctr"/>
+            <a:r>
+              <a:rPr lang="en-AU" sz="5400" dirty="0">
+                <a:latin typeface="Levenim MT" panose="02010502060101010101" pitchFamily="2" charset="-79"/>
+                <a:cs typeface="Levenim MT" panose="02010502060101010101" pitchFamily="2" charset="-79"/>
+              </a:rPr>
+              <a:t>Tutorial 1</a:t>
+            </a:r>
+          </a:p>
         </p:txBody>
       </p:sp>
       <p:sp>
@@ -4381,7 +4430,12 @@
             <p:ph type="subTitle" idx="1"/>
           </p:nvPr>
         </p:nvSpPr>
-        <p:spPr/>
+        <p:spPr>
+          <a:xfrm>
+            <a:off x="1524000" y="4933527"/>
+            <a:ext cx="9144000" cy="1655762"/>
+          </a:xfrm>
+        </p:spPr>
         <p:txBody>
           <a:bodyPr/>
           <a:lstStyle/>
@@ -5420,10 +5474,366 @@
       </p:grpSpPr>
       <p:sp>
         <p:nvSpPr>
+          <p:cNvPr id="2" name="Title 1">
+            <a:extLst>
+              <a:ext uri="{FF2B5EF4-FFF2-40B4-BE49-F238E27FC236}">
+                <a16:creationId xmlns:a16="http://schemas.microsoft.com/office/drawing/2014/main" id="{71F394DA-6449-75B8-D520-BDBDFF5A0207}"/>
+              </a:ext>
+            </a:extLst>
+          </p:cNvPr>
+          <p:cNvSpPr>
+            <a:spLocks noGrp="1"/>
+          </p:cNvSpPr>
+          <p:nvPr>
+            <p:ph type="title"/>
+          </p:nvPr>
+        </p:nvSpPr>
+        <p:spPr>
+          <a:xfrm>
+            <a:off x="838200" y="68346"/>
+            <a:ext cx="10515600" cy="1325563"/>
+          </a:xfrm>
+        </p:spPr>
+        <p:txBody>
+          <a:bodyPr/>
+          <a:lstStyle/>
+          <a:p>
+            <a:r>
+              <a:rPr lang="en-AU" dirty="0"/>
+              <a:t>3 examples</a:t>
+            </a:r>
+          </a:p>
+        </p:txBody>
+      </p:sp>
+      <p:sp>
+        <p:nvSpPr>
+          <p:cNvPr id="3" name="Content Placeholder 2">
+            <a:extLst>
+              <a:ext uri="{FF2B5EF4-FFF2-40B4-BE49-F238E27FC236}">
+                <a16:creationId xmlns:a16="http://schemas.microsoft.com/office/drawing/2014/main" id="{F285210D-3188-1466-8153-3701B5D0B0C7}"/>
+              </a:ext>
+            </a:extLst>
+          </p:cNvPr>
+          <p:cNvSpPr>
+            <a:spLocks noGrp="1"/>
+          </p:cNvSpPr>
+          <p:nvPr>
+            <p:ph idx="1"/>
+          </p:nvPr>
+        </p:nvSpPr>
+        <p:spPr>
+          <a:xfrm>
+            <a:off x="838200" y="1179094"/>
+            <a:ext cx="10515600" cy="5285873"/>
+          </a:xfrm>
+        </p:spPr>
+        <p:txBody>
+          <a:bodyPr/>
+          <a:lstStyle/>
+          <a:p>
+            <a:r>
+              <a:rPr lang="en-AU" dirty="0"/>
+              <a:t>Tiger problem (adapted from </a:t>
+            </a:r>
+            <a:r>
+              <a:rPr lang="en-AU" dirty="0" err="1"/>
+              <a:t>Chades</a:t>
+            </a:r>
+            <a:r>
+              <a:rPr lang="en-AU" dirty="0"/>
+              <a:t> et al., 2008)</a:t>
+            </a:r>
+          </a:p>
+          <a:p>
+            <a:pPr lvl="1"/>
+            <a:r>
+              <a:rPr lang="en-AU" dirty="0"/>
+              <a:t>Basic implementation of the techniques using R</a:t>
+            </a:r>
+          </a:p>
+          <a:p>
+            <a:endParaRPr lang="en-AU" dirty="0"/>
+          </a:p>
+          <a:p>
+            <a:r>
+              <a:rPr lang="en-AU" dirty="0"/>
+              <a:t>Wolf culling (adapted from </a:t>
+            </a:r>
+            <a:r>
+              <a:rPr lang="en-AU" dirty="0" err="1"/>
+              <a:t>Marescot</a:t>
+            </a:r>
+            <a:r>
+              <a:rPr lang="en-AU" dirty="0"/>
+              <a:t> et al., 2013)</a:t>
+            </a:r>
+          </a:p>
+          <a:p>
+            <a:pPr lvl="1"/>
+            <a:r>
+              <a:rPr lang="en-AU" dirty="0"/>
+              <a:t>tutorial/03-tutorial wolf </a:t>
+            </a:r>
+            <a:r>
+              <a:rPr lang="en-AU" dirty="0" err="1"/>
+              <a:t>culling.R</a:t>
+            </a:r>
+            <a:endParaRPr lang="en-AU" dirty="0"/>
+          </a:p>
+          <a:p>
+            <a:endParaRPr lang="en-AU" dirty="0"/>
+          </a:p>
+          <a:p>
+            <a:r>
+              <a:rPr lang="en-AU" dirty="0"/>
+              <a:t>Estimating transition functions</a:t>
+            </a:r>
+          </a:p>
+        </p:txBody>
+      </p:sp>
+    </p:spTree>
+    <p:extLst>
+      <p:ext uri="{BB962C8B-B14F-4D97-AF65-F5344CB8AC3E}">
+        <p14:creationId xmlns:p14="http://schemas.microsoft.com/office/powerpoint/2010/main" val="702636860"/>
+      </p:ext>
+    </p:extLst>
+  </p:cSld>
+  <p:clrMapOvr>
+    <a:masterClrMapping/>
+  </p:clrMapOvr>
+</p:sld>
+</file>
+
+<file path=ppt/slides/slide4.xml><?xml version="1.0" encoding="utf-8"?>
+<p:sld xmlns:a="http://schemas.openxmlformats.org/drawingml/2006/main" xmlns:r="http://schemas.openxmlformats.org/officeDocument/2006/relationships" xmlns:p="http://schemas.openxmlformats.org/presentationml/2006/main">
+  <p:cSld>
+    <p:spTree>
+      <p:nvGrpSpPr>
+        <p:cNvPr id="1" name=""/>
+        <p:cNvGrpSpPr/>
+        <p:nvPr/>
+      </p:nvGrpSpPr>
+      <p:grpSpPr>
+        <a:xfrm>
+          <a:off x="0" y="0"/>
+          <a:ext cx="0" cy="0"/>
+          <a:chOff x="0" y="0"/>
+          <a:chExt cx="0" cy="0"/>
+        </a:xfrm>
+      </p:grpSpPr>
+      <p:sp>
+        <p:nvSpPr>
           <p:cNvPr id="3" name="Freeform: Shape 2">
             <a:extLst>
               <a:ext uri="{FF2B5EF4-FFF2-40B4-BE49-F238E27FC236}">
                 <a16:creationId xmlns:a16="http://schemas.microsoft.com/office/drawing/2014/main" id="{561FEE51-16AA-0BAC-49C0-BD1C2905665D}"/>
+              </a:ext>
+            </a:extLst>
+          </p:cNvPr>
+          <p:cNvSpPr/>
+          <p:nvPr/>
+        </p:nvSpPr>
+        <p:spPr>
+          <a:xfrm>
+            <a:off x="838200" y="92409"/>
+            <a:ext cx="10515599" cy="984281"/>
+          </a:xfrm>
+          <a:custGeom>
+            <a:avLst/>
+            <a:gdLst>
+              <a:gd name="connsiteX0" fmla="*/ 0 w 2507114"/>
+              <a:gd name="connsiteY0" fmla="*/ 290095 h 1740535"/>
+              <a:gd name="connsiteX1" fmla="*/ 290095 w 2507114"/>
+              <a:gd name="connsiteY1" fmla="*/ 0 h 1740535"/>
+              <a:gd name="connsiteX2" fmla="*/ 2217019 w 2507114"/>
+              <a:gd name="connsiteY2" fmla="*/ 0 h 1740535"/>
+              <a:gd name="connsiteX3" fmla="*/ 2507114 w 2507114"/>
+              <a:gd name="connsiteY3" fmla="*/ 290095 h 1740535"/>
+              <a:gd name="connsiteX4" fmla="*/ 2507114 w 2507114"/>
+              <a:gd name="connsiteY4" fmla="*/ 1450440 h 1740535"/>
+              <a:gd name="connsiteX5" fmla="*/ 2217019 w 2507114"/>
+              <a:gd name="connsiteY5" fmla="*/ 1740535 h 1740535"/>
+              <a:gd name="connsiteX6" fmla="*/ 290095 w 2507114"/>
+              <a:gd name="connsiteY6" fmla="*/ 1740535 h 1740535"/>
+              <a:gd name="connsiteX7" fmla="*/ 0 w 2507114"/>
+              <a:gd name="connsiteY7" fmla="*/ 1450440 h 1740535"/>
+              <a:gd name="connsiteX8" fmla="*/ 0 w 2507114"/>
+              <a:gd name="connsiteY8" fmla="*/ 290095 h 1740535"/>
+            </a:gdLst>
+            <a:ahLst/>
+            <a:cxnLst>
+              <a:cxn ang="0">
+                <a:pos x="connsiteX0" y="connsiteY0"/>
+              </a:cxn>
+              <a:cxn ang="0">
+                <a:pos x="connsiteX1" y="connsiteY1"/>
+              </a:cxn>
+              <a:cxn ang="0">
+                <a:pos x="connsiteX2" y="connsiteY2"/>
+              </a:cxn>
+              <a:cxn ang="0">
+                <a:pos x="connsiteX3" y="connsiteY3"/>
+              </a:cxn>
+              <a:cxn ang="0">
+                <a:pos x="connsiteX4" y="connsiteY4"/>
+              </a:cxn>
+              <a:cxn ang="0">
+                <a:pos x="connsiteX5" y="connsiteY5"/>
+              </a:cxn>
+              <a:cxn ang="0">
+                <a:pos x="connsiteX6" y="connsiteY6"/>
+              </a:cxn>
+              <a:cxn ang="0">
+                <a:pos x="connsiteX7" y="connsiteY7"/>
+              </a:cxn>
+              <a:cxn ang="0">
+                <a:pos x="connsiteX8" y="connsiteY8"/>
+              </a:cxn>
+            </a:cxnLst>
+            <a:rect l="l" t="t" r="r" b="b"/>
+            <a:pathLst>
+              <a:path w="2507114" h="1740535">
+                <a:moveTo>
+                  <a:pt x="0" y="290095"/>
+                </a:moveTo>
+                <a:cubicBezTo>
+                  <a:pt x="0" y="129880"/>
+                  <a:pt x="129880" y="0"/>
+                  <a:pt x="290095" y="0"/>
+                </a:cubicBezTo>
+                <a:lnTo>
+                  <a:pt x="2217019" y="0"/>
+                </a:lnTo>
+                <a:cubicBezTo>
+                  <a:pt x="2377234" y="0"/>
+                  <a:pt x="2507114" y="129880"/>
+                  <a:pt x="2507114" y="290095"/>
+                </a:cubicBezTo>
+                <a:lnTo>
+                  <a:pt x="2507114" y="1450440"/>
+                </a:lnTo>
+                <a:cubicBezTo>
+                  <a:pt x="2507114" y="1610655"/>
+                  <a:pt x="2377234" y="1740535"/>
+                  <a:pt x="2217019" y="1740535"/>
+                </a:cubicBezTo>
+                <a:lnTo>
+                  <a:pt x="290095" y="1740535"/>
+                </a:lnTo>
+                <a:cubicBezTo>
+                  <a:pt x="129880" y="1740535"/>
+                  <a:pt x="0" y="1610655"/>
+                  <a:pt x="0" y="1450440"/>
+                </a:cubicBezTo>
+                <a:lnTo>
+                  <a:pt x="0" y="290095"/>
+                </a:lnTo>
+                <a:close/>
+              </a:path>
+            </a:pathLst>
+          </a:custGeom>
+          <a:solidFill>
+            <a:srgbClr val="188C54"/>
+          </a:solidFill>
+        </p:spPr>
+        <p:style>
+          <a:lnRef idx="2">
+            <a:schemeClr val="lt1">
+              <a:hueOff val="0"/>
+              <a:satOff val="0"/>
+              <a:lumOff val="0"/>
+              <a:alphaOff val="0"/>
+            </a:schemeClr>
+          </a:lnRef>
+          <a:fillRef idx="1">
+            <a:schemeClr val="accent3">
+              <a:hueOff val="0"/>
+              <a:satOff val="0"/>
+              <a:lumOff val="0"/>
+              <a:alphaOff val="0"/>
+            </a:schemeClr>
+          </a:fillRef>
+          <a:effectRef idx="0">
+            <a:schemeClr val="accent3">
+              <a:hueOff val="0"/>
+              <a:satOff val="0"/>
+              <a:lumOff val="0"/>
+              <a:alphaOff val="0"/>
+            </a:schemeClr>
+          </a:effectRef>
+          <a:fontRef idx="minor">
+            <a:schemeClr val="lt1"/>
+          </a:fontRef>
+        </p:style>
+        <p:txBody>
+          <a:bodyPr spcFirstLastPara="0" vert="horz" wrap="square" lIns="214506" tIns="214506" rIns="214506" bIns="214506" numCol="1" spcCol="1270" anchor="ctr" anchorCtr="0">
+            <a:noAutofit/>
+          </a:bodyPr>
+          <a:lstStyle/>
+          <a:p>
+            <a:pPr marL="0" lvl="0" indent="0" algn="ctr" defTabSz="1511300">
+              <a:lnSpc>
+                <a:spcPct val="90000"/>
+              </a:lnSpc>
+              <a:spcBef>
+                <a:spcPct val="0"/>
+              </a:spcBef>
+              <a:spcAft>
+                <a:spcPct val="35000"/>
+              </a:spcAft>
+              <a:buNone/>
+            </a:pPr>
+            <a:r>
+              <a:rPr lang="en-AU" sz="3400" kern="1200" dirty="0">
+                <a:latin typeface="Levenim MT" panose="02010502060101010101" pitchFamily="2" charset="-79"/>
+              </a:rPr>
+              <a:t>Markov Decision Processes</a:t>
+            </a:r>
+          </a:p>
+        </p:txBody>
+      </p:sp>
+    </p:spTree>
+    <p:extLst>
+      <p:ext uri="{BB962C8B-B14F-4D97-AF65-F5344CB8AC3E}">
+        <p14:creationId xmlns:p14="http://schemas.microsoft.com/office/powerpoint/2010/main" val="2074379464"/>
+      </p:ext>
+    </p:extLst>
+  </p:cSld>
+  <p:clrMapOvr>
+    <a:masterClrMapping/>
+  </p:clrMapOvr>
+</p:sld>
+</file>
+
+<file path=ppt/slides/slide5.xml><?xml version="1.0" encoding="utf-8"?>
+<p:sld xmlns:a="http://schemas.openxmlformats.org/drawingml/2006/main" xmlns:r="http://schemas.openxmlformats.org/officeDocument/2006/relationships" xmlns:p="http://schemas.openxmlformats.org/presentationml/2006/main">
+  <p:cSld>
+    <p:spTree>
+      <p:nvGrpSpPr>
+        <p:cNvPr id="1" name="">
+          <a:extLst>
+            <a:ext uri="{FF2B5EF4-FFF2-40B4-BE49-F238E27FC236}">
+              <a16:creationId xmlns:a16="http://schemas.microsoft.com/office/drawing/2014/main" id="{2C366380-7B37-A3B0-13FE-E6C26A52083C}"/>
+            </a:ext>
+          </a:extLst>
+        </p:cNvPr>
+        <p:cNvGrpSpPr/>
+        <p:nvPr/>
+      </p:nvGrpSpPr>
+      <p:grpSpPr>
+        <a:xfrm>
+          <a:off x="0" y="0"/>
+          <a:ext cx="0" cy="0"/>
+          <a:chOff x="0" y="0"/>
+          <a:chExt cx="0" cy="0"/>
+        </a:xfrm>
+      </p:grpSpPr>
+      <p:sp>
+        <p:nvSpPr>
+          <p:cNvPr id="3" name="Freeform: Shape 2">
+            <a:extLst>
+              <a:ext uri="{FF2B5EF4-FFF2-40B4-BE49-F238E27FC236}">
+                <a16:creationId xmlns:a16="http://schemas.microsoft.com/office/drawing/2014/main" id="{BC03FB7B-7EC5-311A-3B6F-7BF9901819BE}"/>
               </a:ext>
             </a:extLst>
           </p:cNvPr>
@@ -5594,7 +6004,7 @@
           <p:cNvPr id="39" name="Graphic 38" descr="Frog with solid fill">
             <a:extLst>
               <a:ext uri="{FF2B5EF4-FFF2-40B4-BE49-F238E27FC236}">
-                <a16:creationId xmlns:a16="http://schemas.microsoft.com/office/drawing/2014/main" id="{12BD7FAB-C883-BC4E-BF94-2D8660508883}"/>
+                <a16:creationId xmlns:a16="http://schemas.microsoft.com/office/drawing/2014/main" id="{48AE43BB-B524-3306-92DD-E1C729F86009}"/>
               </a:ext>
             </a:extLst>
           </p:cNvPr>
@@ -5630,7 +6040,7 @@
           <p:cNvPr id="42" name="TextBox 41">
             <a:extLst>
               <a:ext uri="{FF2B5EF4-FFF2-40B4-BE49-F238E27FC236}">
-                <a16:creationId xmlns:a16="http://schemas.microsoft.com/office/drawing/2014/main" id="{D7EA0E11-9CE7-8C27-1464-A24F81D5323D}"/>
+                <a16:creationId xmlns:a16="http://schemas.microsoft.com/office/drawing/2014/main" id="{2A8F7B98-1D85-0402-F09F-115DBED7B522}"/>
               </a:ext>
             </a:extLst>
           </p:cNvPr>
@@ -5669,7 +6079,7 @@
           <p:cNvPr id="43" name="Group 42">
             <a:extLst>
               <a:ext uri="{FF2B5EF4-FFF2-40B4-BE49-F238E27FC236}">
-                <a16:creationId xmlns:a16="http://schemas.microsoft.com/office/drawing/2014/main" id="{6C3984E4-C015-C10C-99E4-44DD0AC02AF5}"/>
+                <a16:creationId xmlns:a16="http://schemas.microsoft.com/office/drawing/2014/main" id="{ADE82A02-FA4F-1231-F4F9-988479619226}"/>
               </a:ext>
             </a:extLst>
           </p:cNvPr>
@@ -5689,7 +6099,7 @@
             <p:cNvPr id="46" name="Graphic 45" descr="Frog with solid fill">
               <a:extLst>
                 <a:ext uri="{FF2B5EF4-FFF2-40B4-BE49-F238E27FC236}">
-                  <a16:creationId xmlns:a16="http://schemas.microsoft.com/office/drawing/2014/main" id="{D61ACAF2-C843-978D-7185-1CC1C44E5E43}"/>
+                  <a16:creationId xmlns:a16="http://schemas.microsoft.com/office/drawing/2014/main" id="{02C7AAF9-2DA9-59EE-BFAE-80CD458B6B47}"/>
                 </a:ext>
               </a:extLst>
             </p:cNvPr>
@@ -5725,7 +6135,7 @@
             <p:cNvPr id="47" name="Graphic 46" descr="Frog with solid fill">
               <a:extLst>
                 <a:ext uri="{FF2B5EF4-FFF2-40B4-BE49-F238E27FC236}">
-                  <a16:creationId xmlns:a16="http://schemas.microsoft.com/office/drawing/2014/main" id="{9055A6BB-7B6A-6995-DCDF-BA277AD38BF7}"/>
+                  <a16:creationId xmlns:a16="http://schemas.microsoft.com/office/drawing/2014/main" id="{2F0D1EF8-42AE-E943-6703-23616B2A2F43}"/>
                 </a:ext>
               </a:extLst>
             </p:cNvPr>
@@ -5761,7 +6171,7 @@
             <p:cNvPr id="48" name="Graphic 47" descr="Frog with solid fill">
               <a:extLst>
                 <a:ext uri="{FF2B5EF4-FFF2-40B4-BE49-F238E27FC236}">
-                  <a16:creationId xmlns:a16="http://schemas.microsoft.com/office/drawing/2014/main" id="{ADC12DC3-00CF-715D-B366-0924B93DDE2D}"/>
+                  <a16:creationId xmlns:a16="http://schemas.microsoft.com/office/drawing/2014/main" id="{EEE1A482-8279-1A85-C67F-DFA057A0D7C1}"/>
                 </a:ext>
               </a:extLst>
             </p:cNvPr>
@@ -5798,7 +6208,7 @@
           <p:cNvPr id="51" name="TextBox 50">
             <a:extLst>
               <a:ext uri="{FF2B5EF4-FFF2-40B4-BE49-F238E27FC236}">
-                <a16:creationId xmlns:a16="http://schemas.microsoft.com/office/drawing/2014/main" id="{02D209C1-0B6D-1713-3621-0F05878E37AE}"/>
+                <a16:creationId xmlns:a16="http://schemas.microsoft.com/office/drawing/2014/main" id="{19E6AB64-F122-FD39-1380-5ED22FAAD52C}"/>
               </a:ext>
             </a:extLst>
           </p:cNvPr>
@@ -5837,7 +6247,7 @@
           <p:cNvPr id="73" name="TextBox 72">
             <a:extLst>
               <a:ext uri="{FF2B5EF4-FFF2-40B4-BE49-F238E27FC236}">
-                <a16:creationId xmlns:a16="http://schemas.microsoft.com/office/drawing/2014/main" id="{B7BBC532-A97C-46A4-4667-7CA89217263A}"/>
+                <a16:creationId xmlns:a16="http://schemas.microsoft.com/office/drawing/2014/main" id="{1A2BD61F-A436-AEC4-544B-2E86103D2CF4}"/>
               </a:ext>
             </a:extLst>
           </p:cNvPr>
@@ -5876,7 +6286,7 @@
           <p:cNvPr id="109" name="TextBox 108">
             <a:extLst>
               <a:ext uri="{FF2B5EF4-FFF2-40B4-BE49-F238E27FC236}">
-                <a16:creationId xmlns:a16="http://schemas.microsoft.com/office/drawing/2014/main" id="{6ACEFAEB-DDF1-8FE1-B410-43EAEE2E6994}"/>
+                <a16:creationId xmlns:a16="http://schemas.microsoft.com/office/drawing/2014/main" id="{A7466742-B07B-9081-CEC6-40A1849551AF}"/>
               </a:ext>
             </a:extLst>
           </p:cNvPr>
@@ -5915,7 +6325,7 @@
           <p:cNvPr id="111" name="Graphic 110" descr="No sign with solid fill">
             <a:extLst>
               <a:ext uri="{FF2B5EF4-FFF2-40B4-BE49-F238E27FC236}">
-                <a16:creationId xmlns:a16="http://schemas.microsoft.com/office/drawing/2014/main" id="{1BE12D3F-9CCE-DB99-5B82-1B15A8ECAFC4}"/>
+                <a16:creationId xmlns:a16="http://schemas.microsoft.com/office/drawing/2014/main" id="{391320E2-4639-3BBC-A78D-9FAD5D365F0E}"/>
               </a:ext>
             </a:extLst>
           </p:cNvPr>
@@ -5951,7 +6361,7 @@
           <p:cNvPr id="124" name="TextBox 123">
             <a:extLst>
               <a:ext uri="{FF2B5EF4-FFF2-40B4-BE49-F238E27FC236}">
-                <a16:creationId xmlns:a16="http://schemas.microsoft.com/office/drawing/2014/main" id="{1692662C-A89B-D00D-E2BC-01EE6FD452F2}"/>
+                <a16:creationId xmlns:a16="http://schemas.microsoft.com/office/drawing/2014/main" id="{F7711985-FB92-DC0C-BAD0-1BB2AA274711}"/>
               </a:ext>
             </a:extLst>
           </p:cNvPr>
@@ -5990,7 +6400,7 @@
           <p:cNvPr id="113" name="Graphic 112" descr="Open hand with plant with solid fill">
             <a:extLst>
               <a:ext uri="{FF2B5EF4-FFF2-40B4-BE49-F238E27FC236}">
-                <a16:creationId xmlns:a16="http://schemas.microsoft.com/office/drawing/2014/main" id="{5C784253-28A8-FFF8-8CA2-5C28F5663C68}"/>
+                <a16:creationId xmlns:a16="http://schemas.microsoft.com/office/drawing/2014/main" id="{E5B156A1-C5AA-FE7E-F1FB-BE723011D1D1}"/>
               </a:ext>
             </a:extLst>
           </p:cNvPr>
@@ -6026,7 +6436,7 @@
           <p:cNvPr id="126" name="TextBox 125">
             <a:extLst>
               <a:ext uri="{FF2B5EF4-FFF2-40B4-BE49-F238E27FC236}">
-                <a16:creationId xmlns:a16="http://schemas.microsoft.com/office/drawing/2014/main" id="{52C56493-6EED-BDDB-69BA-9E985AE4E59D}"/>
+                <a16:creationId xmlns:a16="http://schemas.microsoft.com/office/drawing/2014/main" id="{D0500EB8-FDA1-A907-9C99-AC1E81CB8962}"/>
               </a:ext>
             </a:extLst>
           </p:cNvPr>
@@ -6065,7 +6475,7 @@
           <p:cNvPr id="132" name="Group 131">
             <a:extLst>
               <a:ext uri="{FF2B5EF4-FFF2-40B4-BE49-F238E27FC236}">
-                <a16:creationId xmlns:a16="http://schemas.microsoft.com/office/drawing/2014/main" id="{A27799ED-BC50-B982-694B-9090F525D637}"/>
+                <a16:creationId xmlns:a16="http://schemas.microsoft.com/office/drawing/2014/main" id="{D98C2B31-FDC5-1B38-BCD6-D9588BCA93AE}"/>
               </a:ext>
             </a:extLst>
           </p:cNvPr>
@@ -6085,7 +6495,7 @@
             <p:cNvPr id="117" name="Graphic 116" descr="Frog with solid fill">
               <a:extLst>
                 <a:ext uri="{FF2B5EF4-FFF2-40B4-BE49-F238E27FC236}">
-                  <a16:creationId xmlns:a16="http://schemas.microsoft.com/office/drawing/2014/main" id="{E1336D99-4489-D5D6-EFEB-DB6CBF4B8CE6}"/>
+                  <a16:creationId xmlns:a16="http://schemas.microsoft.com/office/drawing/2014/main" id="{29D9AA02-DE67-C6E5-02B7-A1776AE4468C}"/>
                 </a:ext>
               </a:extLst>
             </p:cNvPr>
@@ -6121,7 +6531,7 @@
             <p:cNvPr id="115" name="Graphic 114" descr="Fence with solid fill">
               <a:extLst>
                 <a:ext uri="{FF2B5EF4-FFF2-40B4-BE49-F238E27FC236}">
-                  <a16:creationId xmlns:a16="http://schemas.microsoft.com/office/drawing/2014/main" id="{B7CABC23-2FF3-A1CB-C72A-FE7A1695C4EA}"/>
+                  <a16:creationId xmlns:a16="http://schemas.microsoft.com/office/drawing/2014/main" id="{EAD82ECA-68FF-83BC-B70F-76E4F87E1909}"/>
                 </a:ext>
               </a:extLst>
             </p:cNvPr>
@@ -6157,7 +6567,7 @@
             <p:cNvPr id="119" name="Graphic 118" descr="Frog with solid fill">
               <a:extLst>
                 <a:ext uri="{FF2B5EF4-FFF2-40B4-BE49-F238E27FC236}">
-                  <a16:creationId xmlns:a16="http://schemas.microsoft.com/office/drawing/2014/main" id="{AC069B08-6F78-7059-119F-E83012A133D8}"/>
+                  <a16:creationId xmlns:a16="http://schemas.microsoft.com/office/drawing/2014/main" id="{B6AA9C07-EC77-B87D-306D-7CB625859173}"/>
                 </a:ext>
               </a:extLst>
             </p:cNvPr>
@@ -6193,7 +6603,7 @@
             <p:cNvPr id="121" name="Graphic 120" descr="Frog with solid fill">
               <a:extLst>
                 <a:ext uri="{FF2B5EF4-FFF2-40B4-BE49-F238E27FC236}">
-                  <a16:creationId xmlns:a16="http://schemas.microsoft.com/office/drawing/2014/main" id="{7AD3CD21-6A4F-91AD-776D-EEE4984657B3}"/>
+                  <a16:creationId xmlns:a16="http://schemas.microsoft.com/office/drawing/2014/main" id="{08A7900B-F8D5-1B42-FFA0-90E6ECE70311}"/>
                 </a:ext>
               </a:extLst>
             </p:cNvPr>
@@ -6230,7 +6640,7 @@
           <p:cNvPr id="128" name="TextBox 127">
             <a:extLst>
               <a:ext uri="{FF2B5EF4-FFF2-40B4-BE49-F238E27FC236}">
-                <a16:creationId xmlns:a16="http://schemas.microsoft.com/office/drawing/2014/main" id="{123B23DF-4607-BB6C-D21D-319F67426C99}"/>
+                <a16:creationId xmlns:a16="http://schemas.microsoft.com/office/drawing/2014/main" id="{72C032D6-D2C7-4363-CBE8-90C0C265E1E9}"/>
               </a:ext>
             </a:extLst>
           </p:cNvPr>
@@ -6267,7 +6677,7 @@
     </p:spTree>
     <p:extLst>
       <p:ext uri="{BB962C8B-B14F-4D97-AF65-F5344CB8AC3E}">
-        <p14:creationId xmlns:p14="http://schemas.microsoft.com/office/powerpoint/2010/main" val="2074379464"/>
+        <p14:creationId xmlns:p14="http://schemas.microsoft.com/office/powerpoint/2010/main" val="3187059221"/>
       </p:ext>
     </p:extLst>
   </p:cSld>
